--- a/marketing/regions/vladimir/sitall-deck-minselhoz.pptx
+++ b/marketing/regions/vladimir/sitall-deck-minselhoz.pptx
@@ -1946,7 +1946,7 @@
                 <a:ea typeface="Segoe UI Semibold" pitchFamily="34" charset="-122"/>
                 <a:cs typeface="Segoe UI Semibold" pitchFamily="34" charset="-120"/>
               </a:rPr>
-              <a:t>АВГУСТ 2026 · КОНФИДЕНЦИАЛЬНО</a:t>
+              <a:t>СЕНТЯБРЬ 2026 · КОНФИДЕНЦИАЛЬНО</a:t>
             </a:r>
             <a:endParaRPr lang="en-US" sz="1300" dirty="0"/>
           </a:p>
